--- a/110_linux_script_exercise/linux_03_grep_awk_sed_find_실무심화.pptx
+++ b/110_linux_script_exercise/linux_03_grep_awk_sed_find_실무심화.pptx
@@ -5,29 +5,29 @@
     <p:sldMasterId id="2147483648" r:id="rId1"/>
   </p:sldMasterIdLst>
   <p:sldIdLst>
-    <p:sldId id="256" r:id="rId7"/>
-    <p:sldId id="257" r:id="rId8"/>
-    <p:sldId id="258" r:id="rId9"/>
-    <p:sldId id="259" r:id="rId10"/>
-    <p:sldId id="260" r:id="rId11"/>
-    <p:sldId id="261" r:id="rId12"/>
-    <p:sldId id="262" r:id="rId13"/>
-    <p:sldId id="263" r:id="rId14"/>
-    <p:sldId id="264" r:id="rId15"/>
-    <p:sldId id="265" r:id="rId16"/>
-    <p:sldId id="266" r:id="rId17"/>
-    <p:sldId id="267" r:id="rId18"/>
-    <p:sldId id="268" r:id="rId19"/>
-    <p:sldId id="269" r:id="rId20"/>
-    <p:sldId id="270" r:id="rId21"/>
-    <p:sldId id="271" r:id="rId22"/>
-    <p:sldId id="272" r:id="rId23"/>
-    <p:sldId id="273" r:id="rId24"/>
-    <p:sldId id="274" r:id="rId25"/>
-    <p:sldId id="275" r:id="rId26"/>
-    <p:sldId id="276" r:id="rId27"/>
+    <p:sldId id="256" r:id="rId2"/>
+    <p:sldId id="257" r:id="rId3"/>
+    <p:sldId id="258" r:id="rId4"/>
+    <p:sldId id="259" r:id="rId5"/>
+    <p:sldId id="260" r:id="rId6"/>
+    <p:sldId id="261" r:id="rId7"/>
+    <p:sldId id="262" r:id="rId8"/>
+    <p:sldId id="263" r:id="rId9"/>
+    <p:sldId id="264" r:id="rId10"/>
+    <p:sldId id="265" r:id="rId11"/>
+    <p:sldId id="266" r:id="rId12"/>
+    <p:sldId id="267" r:id="rId13"/>
+    <p:sldId id="268" r:id="rId14"/>
+    <p:sldId id="269" r:id="rId15"/>
+    <p:sldId id="270" r:id="rId16"/>
+    <p:sldId id="271" r:id="rId17"/>
+    <p:sldId id="272" r:id="rId18"/>
+    <p:sldId id="273" r:id="rId19"/>
+    <p:sldId id="274" r:id="rId20"/>
+    <p:sldId id="275" r:id="rId21"/>
+    <p:sldId id="276" r:id="rId22"/>
   </p:sldIdLst>
-  <p:sldSz cx="12191695" cy="6858000" type="screen4x3"/>
+  <p:sldSz cx="12192000" cy="6858000"/>
   <p:notesSz cx="6858000" cy="9144000"/>
   <p:defaultTextStyle>
     <a:defPPr>
@@ -124,6 +124,22 @@
       </a:defRPr>
     </a:lvl9pPr>
   </p:defaultTextStyle>
+  <p:extLst>
+    <p:ext uri="{EFAFB233-063F-42B5-8137-9DF3F51BA10A}">
+      <p15:sldGuideLst xmlns:p15="http://schemas.microsoft.com/office/powerpoint/2012/main">
+        <p15:guide id="1" orient="horz" pos="2160">
+          <p15:clr>
+            <a:srgbClr val="A4A3A4"/>
+          </p15:clr>
+        </p15:guide>
+        <p15:guide id="2" pos="2880">
+          <p15:clr>
+            <a:srgbClr val="A4A3A4"/>
+          </p15:clr>
+        </p15:guide>
+      </p15:sldGuideLst>
+    </p:ext>
+  </p:extLst>
 </p:presentation>
 </file>
 
@@ -156,7 +172,7 @@
         </p:nvSpPr>
         <p:spPr>
           <a:xfrm>
-            <a:off x="685800" y="2130425"/>
+            <a:off x="2209800" y="1395412"/>
             <a:ext cx="7772400" cy="1470025"/>
           </a:xfrm>
         </p:spPr>
@@ -165,10 +181,9 @@
           <a:lstStyle/>
           <a:p>
             <a:r>
-              <a:rPr lang="en-US" smtClean="0"/>
+              <a:rPr lang="en-US"/>
               <a:t>Click to edit Master title style</a:t>
             </a:r>
-            <a:endParaRPr lang="en-US"/>
           </a:p>
         </p:txBody>
       </p:sp>
@@ -184,7 +199,7 @@
         </p:nvSpPr>
         <p:spPr>
           <a:xfrm>
-            <a:off x="1371600" y="3886200"/>
+            <a:off x="2895600" y="3564082"/>
             <a:ext cx="6400800" cy="1752600"/>
           </a:xfrm>
         </p:spPr>
@@ -284,10 +299,9 @@
           </a:lstStyle>
           <a:p>
             <a:r>
-              <a:rPr lang="en-US" smtClean="0"/>
+              <a:rPr lang="en-US"/>
               <a:t>Click to edit Master subtitle style</a:t>
             </a:r>
-            <a:endParaRPr lang="en-US"/>
           </a:p>
         </p:txBody>
       </p:sp>
@@ -308,7 +322,7 @@
           <a:p>
             <a:fld id="{5BCAD085-E8A6-8845-BD4E-CB4CCA059FC4}" type="datetimeFigureOut">
               <a:rPr lang="en-US" smtClean="0"/>
-              <a:t>1/27/13</a:t>
+              <a:t>9/29/2026</a:t>
             </a:fld>
             <a:endParaRPr lang="en-US"/>
           </a:p>
@@ -402,10 +416,9 @@
           <a:lstStyle/>
           <a:p>
             <a:r>
-              <a:rPr lang="en-US" smtClean="0"/>
+              <a:rPr lang="en-US"/>
               <a:t>Click to edit Master title style</a:t>
             </a:r>
-            <a:endParaRPr lang="en-US"/>
           </a:p>
         </p:txBody>
       </p:sp>
@@ -426,38 +439,37 @@
           <a:p>
             <a:pPr lvl="0"/>
             <a:r>
-              <a:rPr lang="en-US" smtClean="0"/>
+              <a:rPr lang="en-US"/>
               <a:t>Click to edit Master text styles</a:t>
             </a:r>
           </a:p>
           <a:p>
             <a:pPr lvl="1"/>
             <a:r>
-              <a:rPr lang="en-US" smtClean="0"/>
+              <a:rPr lang="en-US"/>
               <a:t>Second level</a:t>
             </a:r>
           </a:p>
           <a:p>
             <a:pPr lvl="2"/>
             <a:r>
-              <a:rPr lang="en-US" smtClean="0"/>
+              <a:rPr lang="en-US"/>
               <a:t>Third level</a:t>
             </a:r>
           </a:p>
           <a:p>
             <a:pPr lvl="3"/>
             <a:r>
-              <a:rPr lang="en-US" smtClean="0"/>
+              <a:rPr lang="en-US"/>
               <a:t>Fourth level</a:t>
             </a:r>
           </a:p>
           <a:p>
             <a:pPr lvl="4"/>
             <a:r>
-              <a:rPr lang="en-US" smtClean="0"/>
+              <a:rPr lang="en-US"/>
               <a:t>Fifth level</a:t>
             </a:r>
-            <a:endParaRPr lang="en-US"/>
           </a:p>
         </p:txBody>
       </p:sp>
@@ -478,7 +490,7 @@
           <a:p>
             <a:fld id="{5BCAD085-E8A6-8845-BD4E-CB4CCA059FC4}" type="datetimeFigureOut">
               <a:rPr lang="en-US" smtClean="0"/>
-              <a:t>1/27/13</a:t>
+              <a:t>9/29/2026</a:t>
             </a:fld>
             <a:endParaRPr lang="en-US"/>
           </a:p>
@@ -577,10 +589,9 @@
           <a:lstStyle/>
           <a:p>
             <a:r>
-              <a:rPr lang="en-US" smtClean="0"/>
+              <a:rPr lang="en-US"/>
               <a:t>Click to edit Master title style</a:t>
             </a:r>
-            <a:endParaRPr lang="en-US"/>
           </a:p>
         </p:txBody>
       </p:sp>
@@ -606,38 +617,37 @@
           <a:p>
             <a:pPr lvl="0"/>
             <a:r>
-              <a:rPr lang="en-US" smtClean="0"/>
+              <a:rPr lang="en-US"/>
               <a:t>Click to edit Master text styles</a:t>
             </a:r>
           </a:p>
           <a:p>
             <a:pPr lvl="1"/>
             <a:r>
-              <a:rPr lang="en-US" smtClean="0"/>
+              <a:rPr lang="en-US"/>
               <a:t>Second level</a:t>
             </a:r>
           </a:p>
           <a:p>
             <a:pPr lvl="2"/>
             <a:r>
-              <a:rPr lang="en-US" smtClean="0"/>
+              <a:rPr lang="en-US"/>
               <a:t>Third level</a:t>
             </a:r>
           </a:p>
           <a:p>
             <a:pPr lvl="3"/>
             <a:r>
-              <a:rPr lang="en-US" smtClean="0"/>
+              <a:rPr lang="en-US"/>
               <a:t>Fourth level</a:t>
             </a:r>
           </a:p>
           <a:p>
             <a:pPr lvl="4"/>
             <a:r>
-              <a:rPr lang="en-US" smtClean="0"/>
+              <a:rPr lang="en-US"/>
               <a:t>Fifth level</a:t>
             </a:r>
-            <a:endParaRPr lang="en-US"/>
           </a:p>
         </p:txBody>
       </p:sp>
@@ -658,7 +668,7 @@
           <a:p>
             <a:fld id="{5BCAD085-E8A6-8845-BD4E-CB4CCA059FC4}" type="datetimeFigureOut">
               <a:rPr lang="en-US" smtClean="0"/>
-              <a:t>1/27/13</a:t>
+              <a:t>9/29/2026</a:t>
             </a:fld>
             <a:endParaRPr lang="en-US"/>
           </a:p>
@@ -752,10 +762,9 @@
           <a:lstStyle/>
           <a:p>
             <a:r>
-              <a:rPr lang="en-US" smtClean="0"/>
+              <a:rPr lang="en-US"/>
               <a:t>Click to edit Master title style</a:t>
             </a:r>
-            <a:endParaRPr lang="en-US"/>
           </a:p>
         </p:txBody>
       </p:sp>
@@ -776,38 +785,37 @@
           <a:p>
             <a:pPr lvl="0"/>
             <a:r>
-              <a:rPr lang="en-US" smtClean="0"/>
+              <a:rPr lang="en-US"/>
               <a:t>Click to edit Master text styles</a:t>
             </a:r>
           </a:p>
           <a:p>
             <a:pPr lvl="1"/>
             <a:r>
-              <a:rPr lang="en-US" smtClean="0"/>
+              <a:rPr lang="en-US"/>
               <a:t>Second level</a:t>
             </a:r>
           </a:p>
           <a:p>
             <a:pPr lvl="2"/>
             <a:r>
-              <a:rPr lang="en-US" smtClean="0"/>
+              <a:rPr lang="en-US"/>
               <a:t>Third level</a:t>
             </a:r>
           </a:p>
           <a:p>
             <a:pPr lvl="3"/>
             <a:r>
-              <a:rPr lang="en-US" smtClean="0"/>
+              <a:rPr lang="en-US"/>
               <a:t>Fourth level</a:t>
             </a:r>
           </a:p>
           <a:p>
             <a:pPr lvl="4"/>
             <a:r>
-              <a:rPr lang="en-US" smtClean="0"/>
+              <a:rPr lang="en-US"/>
               <a:t>Fifth level</a:t>
             </a:r>
-            <a:endParaRPr lang="en-US"/>
           </a:p>
         </p:txBody>
       </p:sp>
@@ -828,7 +836,7 @@
           <a:p>
             <a:fld id="{5BCAD085-E8A6-8845-BD4E-CB4CCA059FC4}" type="datetimeFigureOut">
               <a:rPr lang="en-US" smtClean="0"/>
-              <a:t>1/27/13</a:t>
+              <a:t>9/29/2026</a:t>
             </a:fld>
             <a:endParaRPr lang="en-US"/>
           </a:p>
@@ -931,10 +939,9 @@
           </a:lstStyle>
           <a:p>
             <a:r>
-              <a:rPr lang="en-US" smtClean="0"/>
+              <a:rPr lang="en-US"/>
               <a:t>Click to edit Master title style</a:t>
             </a:r>
-            <a:endParaRPr lang="en-US"/>
           </a:p>
         </p:txBody>
       </p:sp>
@@ -1051,7 +1058,7 @@
           <a:p>
             <a:pPr lvl="0"/>
             <a:r>
-              <a:rPr lang="en-US" smtClean="0"/>
+              <a:rPr lang="en-US"/>
               <a:t>Click to edit Master text styles</a:t>
             </a:r>
           </a:p>
@@ -1074,7 +1081,7 @@
           <a:p>
             <a:fld id="{5BCAD085-E8A6-8845-BD4E-CB4CCA059FC4}" type="datetimeFigureOut">
               <a:rPr lang="en-US" smtClean="0"/>
-              <a:t>1/27/13</a:t>
+              <a:t>9/29/2026</a:t>
             </a:fld>
             <a:endParaRPr lang="en-US"/>
           </a:p>
@@ -1168,10 +1175,9 @@
           <a:lstStyle/>
           <a:p>
             <a:r>
-              <a:rPr lang="en-US" smtClean="0"/>
+              <a:rPr lang="en-US"/>
               <a:t>Click to edit Master title style</a:t>
             </a:r>
-            <a:endParaRPr lang="en-US"/>
           </a:p>
         </p:txBody>
       </p:sp>
@@ -1225,38 +1231,37 @@
           <a:p>
             <a:pPr lvl="0"/>
             <a:r>
-              <a:rPr lang="en-US" smtClean="0"/>
+              <a:rPr lang="en-US"/>
               <a:t>Click to edit Master text styles</a:t>
             </a:r>
           </a:p>
           <a:p>
             <a:pPr lvl="1"/>
             <a:r>
-              <a:rPr lang="en-US" smtClean="0"/>
+              <a:rPr lang="en-US"/>
               <a:t>Second level</a:t>
             </a:r>
           </a:p>
           <a:p>
             <a:pPr lvl="2"/>
             <a:r>
-              <a:rPr lang="en-US" smtClean="0"/>
+              <a:rPr lang="en-US"/>
               <a:t>Third level</a:t>
             </a:r>
           </a:p>
           <a:p>
             <a:pPr lvl="3"/>
             <a:r>
-              <a:rPr lang="en-US" smtClean="0"/>
+              <a:rPr lang="en-US"/>
               <a:t>Fourth level</a:t>
             </a:r>
           </a:p>
           <a:p>
             <a:pPr lvl="4"/>
             <a:r>
-              <a:rPr lang="en-US" smtClean="0"/>
+              <a:rPr lang="en-US"/>
               <a:t>Fifth level</a:t>
             </a:r>
-            <a:endParaRPr lang="en-US"/>
           </a:p>
         </p:txBody>
       </p:sp>
@@ -1310,38 +1315,37 @@
           <a:p>
             <a:pPr lvl="0"/>
             <a:r>
-              <a:rPr lang="en-US" smtClean="0"/>
+              <a:rPr lang="en-US"/>
               <a:t>Click to edit Master text styles</a:t>
             </a:r>
           </a:p>
           <a:p>
             <a:pPr lvl="1"/>
             <a:r>
-              <a:rPr lang="en-US" smtClean="0"/>
+              <a:rPr lang="en-US"/>
               <a:t>Second level</a:t>
             </a:r>
           </a:p>
           <a:p>
             <a:pPr lvl="2"/>
             <a:r>
-              <a:rPr lang="en-US" smtClean="0"/>
+              <a:rPr lang="en-US"/>
               <a:t>Third level</a:t>
             </a:r>
           </a:p>
           <a:p>
             <a:pPr lvl="3"/>
             <a:r>
-              <a:rPr lang="en-US" smtClean="0"/>
+              <a:rPr lang="en-US"/>
               <a:t>Fourth level</a:t>
             </a:r>
           </a:p>
           <a:p>
             <a:pPr lvl="4"/>
             <a:r>
-              <a:rPr lang="en-US" smtClean="0"/>
+              <a:rPr lang="en-US"/>
               <a:t>Fifth level</a:t>
             </a:r>
-            <a:endParaRPr lang="en-US"/>
           </a:p>
         </p:txBody>
       </p:sp>
@@ -1362,7 +1366,7 @@
           <a:p>
             <a:fld id="{5BCAD085-E8A6-8845-BD4E-CB4CCA059FC4}" type="datetimeFigureOut">
               <a:rPr lang="en-US" smtClean="0"/>
-              <a:t>1/27/13</a:t>
+              <a:t>9/29/2026</a:t>
             </a:fld>
             <a:endParaRPr lang="en-US"/>
           </a:p>
@@ -1460,10 +1464,9 @@
           </a:lstStyle>
           <a:p>
             <a:r>
-              <a:rPr lang="en-US" smtClean="0"/>
+              <a:rPr lang="en-US"/>
               <a:t>Click to edit Master title style</a:t>
             </a:r>
-            <a:endParaRPr lang="en-US"/>
           </a:p>
         </p:txBody>
       </p:sp>
@@ -1526,7 +1529,7 @@
           <a:p>
             <a:pPr lvl="0"/>
             <a:r>
-              <a:rPr lang="en-US" smtClean="0"/>
+              <a:rPr lang="en-US"/>
               <a:t>Click to edit Master text styles</a:t>
             </a:r>
           </a:p>
@@ -1582,38 +1585,37 @@
           <a:p>
             <a:pPr lvl="0"/>
             <a:r>
-              <a:rPr lang="en-US" smtClean="0"/>
+              <a:rPr lang="en-US"/>
               <a:t>Click to edit Master text styles</a:t>
             </a:r>
           </a:p>
           <a:p>
             <a:pPr lvl="1"/>
             <a:r>
-              <a:rPr lang="en-US" smtClean="0"/>
+              <a:rPr lang="en-US"/>
               <a:t>Second level</a:t>
             </a:r>
           </a:p>
           <a:p>
             <a:pPr lvl="2"/>
             <a:r>
-              <a:rPr lang="en-US" smtClean="0"/>
+              <a:rPr lang="en-US"/>
               <a:t>Third level</a:t>
             </a:r>
           </a:p>
           <a:p>
             <a:pPr lvl="3"/>
             <a:r>
-              <a:rPr lang="en-US" smtClean="0"/>
+              <a:rPr lang="en-US"/>
               <a:t>Fourth level</a:t>
             </a:r>
           </a:p>
           <a:p>
             <a:pPr lvl="4"/>
             <a:r>
-              <a:rPr lang="en-US" smtClean="0"/>
+              <a:rPr lang="en-US"/>
               <a:t>Fifth level</a:t>
             </a:r>
-            <a:endParaRPr lang="en-US"/>
           </a:p>
         </p:txBody>
       </p:sp>
@@ -1676,7 +1678,7 @@
           <a:p>
             <a:pPr lvl="0"/>
             <a:r>
-              <a:rPr lang="en-US" smtClean="0"/>
+              <a:rPr lang="en-US"/>
               <a:t>Click to edit Master text styles</a:t>
             </a:r>
           </a:p>
@@ -1732,38 +1734,37 @@
           <a:p>
             <a:pPr lvl="0"/>
             <a:r>
-              <a:rPr lang="en-US" smtClean="0"/>
+              <a:rPr lang="en-US"/>
               <a:t>Click to edit Master text styles</a:t>
             </a:r>
           </a:p>
           <a:p>
             <a:pPr lvl="1"/>
             <a:r>
-              <a:rPr lang="en-US" smtClean="0"/>
+              <a:rPr lang="en-US"/>
               <a:t>Second level</a:t>
             </a:r>
           </a:p>
           <a:p>
             <a:pPr lvl="2"/>
             <a:r>
-              <a:rPr lang="en-US" smtClean="0"/>
+              <a:rPr lang="en-US"/>
               <a:t>Third level</a:t>
             </a:r>
           </a:p>
           <a:p>
             <a:pPr lvl="3"/>
             <a:r>
-              <a:rPr lang="en-US" smtClean="0"/>
+              <a:rPr lang="en-US"/>
               <a:t>Fourth level</a:t>
             </a:r>
           </a:p>
           <a:p>
             <a:pPr lvl="4"/>
             <a:r>
-              <a:rPr lang="en-US" smtClean="0"/>
+              <a:rPr lang="en-US"/>
               <a:t>Fifth level</a:t>
             </a:r>
-            <a:endParaRPr lang="en-US"/>
           </a:p>
         </p:txBody>
       </p:sp>
@@ -1784,7 +1785,7 @@
           <a:p>
             <a:fld id="{5BCAD085-E8A6-8845-BD4E-CB4CCA059FC4}" type="datetimeFigureOut">
               <a:rPr lang="en-US" smtClean="0"/>
-              <a:t>1/27/13</a:t>
+              <a:t>9/29/2026</a:t>
             </a:fld>
             <a:endParaRPr lang="en-US"/>
           </a:p>
@@ -1878,10 +1879,9 @@
           <a:lstStyle/>
           <a:p>
             <a:r>
-              <a:rPr lang="en-US" smtClean="0"/>
+              <a:rPr lang="en-US"/>
               <a:t>Click to edit Master title style</a:t>
             </a:r>
-            <a:endParaRPr lang="en-US"/>
           </a:p>
         </p:txBody>
       </p:sp>
@@ -1902,7 +1902,7 @@
           <a:p>
             <a:fld id="{5BCAD085-E8A6-8845-BD4E-CB4CCA059FC4}" type="datetimeFigureOut">
               <a:rPr lang="en-US" smtClean="0"/>
-              <a:t>1/27/13</a:t>
+              <a:t>9/29/2026</a:t>
             </a:fld>
             <a:endParaRPr lang="en-US"/>
           </a:p>
@@ -1997,7 +1997,7 @@
           <a:p>
             <a:fld id="{5BCAD085-E8A6-8845-BD4E-CB4CCA059FC4}" type="datetimeFigureOut">
               <a:rPr lang="en-US" smtClean="0"/>
-              <a:t>1/27/13</a:t>
+              <a:t>9/29/2026</a:t>
             </a:fld>
             <a:endParaRPr lang="en-US"/>
           </a:p>
@@ -2100,10 +2100,9 @@
           </a:lstStyle>
           <a:p>
             <a:r>
-              <a:rPr lang="en-US" smtClean="0"/>
+              <a:rPr lang="en-US"/>
               <a:t>Click to edit Master title style</a:t>
             </a:r>
-            <a:endParaRPr lang="en-US"/>
           </a:p>
         </p:txBody>
       </p:sp>
@@ -2157,38 +2156,37 @@
           <a:p>
             <a:pPr lvl="0"/>
             <a:r>
-              <a:rPr lang="en-US" smtClean="0"/>
+              <a:rPr lang="en-US"/>
               <a:t>Click to edit Master text styles</a:t>
             </a:r>
           </a:p>
           <a:p>
             <a:pPr lvl="1"/>
             <a:r>
-              <a:rPr lang="en-US" smtClean="0"/>
+              <a:rPr lang="en-US"/>
               <a:t>Second level</a:t>
             </a:r>
           </a:p>
           <a:p>
             <a:pPr lvl="2"/>
             <a:r>
-              <a:rPr lang="en-US" smtClean="0"/>
+              <a:rPr lang="en-US"/>
               <a:t>Third level</a:t>
             </a:r>
           </a:p>
           <a:p>
             <a:pPr lvl="3"/>
             <a:r>
-              <a:rPr lang="en-US" smtClean="0"/>
+              <a:rPr lang="en-US"/>
               <a:t>Fourth level</a:t>
             </a:r>
           </a:p>
           <a:p>
             <a:pPr lvl="4"/>
             <a:r>
-              <a:rPr lang="en-US" smtClean="0"/>
+              <a:rPr lang="en-US"/>
               <a:t>Fifth level</a:t>
             </a:r>
-            <a:endParaRPr lang="en-US"/>
           </a:p>
         </p:txBody>
       </p:sp>
@@ -2251,7 +2249,7 @@
           <a:p>
             <a:pPr lvl="0"/>
             <a:r>
-              <a:rPr lang="en-US" smtClean="0"/>
+              <a:rPr lang="en-US"/>
               <a:t>Click to edit Master text styles</a:t>
             </a:r>
           </a:p>
@@ -2274,7 +2272,7 @@
           <a:p>
             <a:fld id="{5BCAD085-E8A6-8845-BD4E-CB4CCA059FC4}" type="datetimeFigureOut">
               <a:rPr lang="en-US" smtClean="0"/>
-              <a:t>1/27/13</a:t>
+              <a:t>9/29/2026</a:t>
             </a:fld>
             <a:endParaRPr lang="en-US"/>
           </a:p>
@@ -2377,10 +2375,9 @@
           </a:lstStyle>
           <a:p>
             <a:r>
-              <a:rPr lang="en-US" smtClean="0"/>
+              <a:rPr lang="en-US"/>
               <a:t>Click to edit Master title style</a:t>
             </a:r>
-            <a:endParaRPr lang="en-US"/>
           </a:p>
         </p:txBody>
       </p:sp>
@@ -2504,7 +2501,7 @@
           <a:p>
             <a:pPr lvl="0"/>
             <a:r>
-              <a:rPr lang="en-US" smtClean="0"/>
+              <a:rPr lang="en-US"/>
               <a:t>Click to edit Master text styles</a:t>
             </a:r>
           </a:p>
@@ -2527,7 +2524,7 @@
           <a:p>
             <a:fld id="{5BCAD085-E8A6-8845-BD4E-CB4CCA059FC4}" type="datetimeFigureOut">
               <a:rPr lang="en-US" smtClean="0"/>
-              <a:t>1/27/13</a:t>
+              <a:t>9/29/2026</a:t>
             </a:fld>
             <a:endParaRPr lang="en-US"/>
           </a:p>
@@ -2623,7 +2620,7 @@
         <p:spPr>
           <a:xfrm>
             <a:off x="457200" y="274638"/>
-            <a:ext cx="8229600" cy="1143000"/>
+            <a:ext cx="11159836" cy="1143000"/>
           </a:xfrm>
           <a:prstGeom prst="rect">
             <a:avLst/>
@@ -2636,10 +2633,9 @@
           <a:lstStyle/>
           <a:p>
             <a:r>
-              <a:rPr lang="en-US" smtClean="0"/>
+              <a:rPr lang="en-US"/>
               <a:t>Click to edit Master title style</a:t>
             </a:r>
-            <a:endParaRPr lang="en-US"/>
           </a:p>
         </p:txBody>
       </p:sp>
@@ -2656,7 +2652,7 @@
         <p:spPr>
           <a:xfrm>
             <a:off x="457200" y="1600200"/>
-            <a:ext cx="8229600" cy="4525963"/>
+            <a:ext cx="11159836" cy="4525963"/>
           </a:xfrm>
           <a:prstGeom prst="rect">
             <a:avLst/>
@@ -2670,38 +2666,37 @@
           <a:p>
             <a:pPr lvl="0"/>
             <a:r>
-              <a:rPr lang="en-US" smtClean="0"/>
+              <a:rPr lang="en-US"/>
               <a:t>Click to edit Master text styles</a:t>
             </a:r>
           </a:p>
           <a:p>
             <a:pPr lvl="1"/>
             <a:r>
-              <a:rPr lang="en-US" smtClean="0"/>
+              <a:rPr lang="en-US"/>
               <a:t>Second level</a:t>
             </a:r>
           </a:p>
           <a:p>
             <a:pPr lvl="2"/>
             <a:r>
-              <a:rPr lang="en-US" smtClean="0"/>
+              <a:rPr lang="en-US"/>
               <a:t>Third level</a:t>
             </a:r>
           </a:p>
           <a:p>
             <a:pPr lvl="3"/>
             <a:r>
-              <a:rPr lang="en-US" smtClean="0"/>
+              <a:rPr lang="en-US"/>
               <a:t>Fourth level</a:t>
             </a:r>
           </a:p>
           <a:p>
             <a:pPr lvl="4"/>
             <a:r>
-              <a:rPr lang="en-US" smtClean="0"/>
+              <a:rPr lang="en-US"/>
               <a:t>Fifth level</a:t>
             </a:r>
-            <a:endParaRPr lang="en-US"/>
           </a:p>
         </p:txBody>
       </p:sp>
@@ -2740,7 +2735,7 @@
           <a:p>
             <a:fld id="{5BCAD085-E8A6-8845-BD4E-CB4CCA059FC4}" type="datetimeFigureOut">
               <a:rPr lang="en-US" smtClean="0"/>
-              <a:t>1/27/13</a:t>
+              <a:t>9/29/2026</a:t>
             </a:fld>
             <a:endParaRPr lang="en-US"/>
           </a:p>
@@ -2758,7 +2753,7 @@
         </p:nvSpPr>
         <p:spPr>
           <a:xfrm>
-            <a:off x="3124200" y="6356350"/>
+            <a:off x="4589318" y="6356350"/>
             <a:ext cx="2895600" cy="365125"/>
           </a:xfrm>
           <a:prstGeom prst="rect">
@@ -2795,7 +2790,7 @@
         </p:nvSpPr>
         <p:spPr>
           <a:xfrm>
-            <a:off x="6553200" y="6356350"/>
+            <a:off x="9483436" y="6356350"/>
             <a:ext cx="2133600" cy="365125"/>
           </a:xfrm>
           <a:prstGeom prst="rect">
@@ -3099,7 +3094,7 @@
 </file>
 
 <file path=ppt/slides/slide1.xml><?xml version="1.0" encoding="utf-8"?>
-<p:sld xmlns:a="http://schemas.openxmlformats.org/drawingml/2006/main" xmlns:p="http://schemas.openxmlformats.org/presentationml/2006/main" xmlns:r="http://schemas.openxmlformats.org/officeDocument/2006/relationships">
+<p:sld xmlns:a="http://schemas.openxmlformats.org/drawingml/2006/main" xmlns:r="http://schemas.openxmlformats.org/officeDocument/2006/relationships" xmlns:p="http://schemas.openxmlformats.org/presentationml/2006/main">
   <p:cSld>
     <p:spTree>
       <p:nvGrpSpPr>
@@ -3107,7 +3102,14 @@
         <p:cNvGrpSpPr/>
         <p:nvPr/>
       </p:nvGrpSpPr>
-      <p:grpSpPr/>
+      <p:grpSpPr>
+        <a:xfrm>
+          <a:off x="0" y="0"/>
+          <a:ext cx="0" cy="0"/>
+          <a:chOff x="0" y="0"/>
+          <a:chExt cx="0" cy="0"/>
+        </a:xfrm>
+      </p:grpSpPr>
       <p:sp>
         <p:nvSpPr>
           <p:cNvPr id="2" name="Title 1"/>
@@ -3159,7 +3161,7 @@
 </file>
 
 <file path=ppt/slides/slide10.xml><?xml version="1.0" encoding="utf-8"?>
-<p:sld xmlns:a="http://schemas.openxmlformats.org/drawingml/2006/main" xmlns:p="http://schemas.openxmlformats.org/presentationml/2006/main" xmlns:r="http://schemas.openxmlformats.org/officeDocument/2006/relationships">
+<p:sld xmlns:a="http://schemas.openxmlformats.org/drawingml/2006/main" xmlns:r="http://schemas.openxmlformats.org/officeDocument/2006/relationships" xmlns:p="http://schemas.openxmlformats.org/presentationml/2006/main">
   <p:cSld>
     <p:spTree>
       <p:nvGrpSpPr>
@@ -3167,7 +3169,14 @@
         <p:cNvGrpSpPr/>
         <p:nvPr/>
       </p:nvGrpSpPr>
-      <p:grpSpPr/>
+      <p:grpSpPr>
+        <a:xfrm>
+          <a:off x="0" y="0"/>
+          <a:ext cx="0" cy="0"/>
+          <a:chOff x="0" y="0"/>
+          <a:chExt cx="0" cy="0"/>
+        </a:xfrm>
+      </p:grpSpPr>
       <p:sp>
         <p:nvSpPr>
           <p:cNvPr id="2" name="Title 1"/>
@@ -3267,6 +3276,7 @@
                 <a:latin typeface="Consolas"/>
               </a:defRPr>
             </a:pPr>
+            <a:endParaRPr/>
           </a:p>
           <a:p>
             <a:pPr>
@@ -3294,6 +3304,7 @@
                 <a:latin typeface="Consolas"/>
               </a:defRPr>
             </a:pPr>
+            <a:endParaRPr/>
           </a:p>
           <a:p>
             <a:pPr>
@@ -3326,7 +3337,7 @@
 </file>
 
 <file path=ppt/slides/slide11.xml><?xml version="1.0" encoding="utf-8"?>
-<p:sld xmlns:a="http://schemas.openxmlformats.org/drawingml/2006/main" xmlns:p="http://schemas.openxmlformats.org/presentationml/2006/main" xmlns:r="http://schemas.openxmlformats.org/officeDocument/2006/relationships">
+<p:sld xmlns:a="http://schemas.openxmlformats.org/drawingml/2006/main" xmlns:r="http://schemas.openxmlformats.org/officeDocument/2006/relationships" xmlns:p="http://schemas.openxmlformats.org/presentationml/2006/main">
   <p:cSld>
     <p:spTree>
       <p:nvGrpSpPr>
@@ -3334,7 +3345,14 @@
         <p:cNvGrpSpPr/>
         <p:nvPr/>
       </p:nvGrpSpPr>
-      <p:grpSpPr/>
+      <p:grpSpPr>
+        <a:xfrm>
+          <a:off x="0" y="0"/>
+          <a:ext cx="0" cy="0"/>
+          <a:chOff x="0" y="0"/>
+          <a:chExt cx="0" cy="0"/>
+        </a:xfrm>
+      </p:grpSpPr>
       <p:sp>
         <p:nvSpPr>
           <p:cNvPr id="2" name="Title 1"/>
@@ -3469,7 +3487,7 @@
 </file>
 
 <file path=ppt/slides/slide12.xml><?xml version="1.0" encoding="utf-8"?>
-<p:sld xmlns:a="http://schemas.openxmlformats.org/drawingml/2006/main" xmlns:p="http://schemas.openxmlformats.org/presentationml/2006/main" xmlns:r="http://schemas.openxmlformats.org/officeDocument/2006/relationships">
+<p:sld xmlns:a="http://schemas.openxmlformats.org/drawingml/2006/main" xmlns:r="http://schemas.openxmlformats.org/officeDocument/2006/relationships" xmlns:p="http://schemas.openxmlformats.org/presentationml/2006/main">
   <p:cSld>
     <p:spTree>
       <p:nvGrpSpPr>
@@ -3477,7 +3495,14 @@
         <p:cNvGrpSpPr/>
         <p:nvPr/>
       </p:nvGrpSpPr>
-      <p:grpSpPr/>
+      <p:grpSpPr>
+        <a:xfrm>
+          <a:off x="0" y="0"/>
+          <a:ext cx="0" cy="0"/>
+          <a:chOff x="0" y="0"/>
+          <a:chExt cx="0" cy="0"/>
+        </a:xfrm>
+      </p:grpSpPr>
       <p:sp>
         <p:nvSpPr>
           <p:cNvPr id="2" name="Title 1"/>
@@ -3567,6 +3592,7 @@
                 <a:latin typeface="Consolas"/>
               </a:defRPr>
             </a:pPr>
+            <a:endParaRPr/>
           </a:p>
           <a:p>
             <a:pPr>
@@ -3594,6 +3620,7 @@
                 <a:latin typeface="Consolas"/>
               </a:defRPr>
             </a:pPr>
+            <a:endParaRPr/>
           </a:p>
           <a:p>
             <a:pPr>
@@ -3636,7 +3663,7 @@
 </file>
 
 <file path=ppt/slides/slide13.xml><?xml version="1.0" encoding="utf-8"?>
-<p:sld xmlns:a="http://schemas.openxmlformats.org/drawingml/2006/main" xmlns:p="http://schemas.openxmlformats.org/presentationml/2006/main" xmlns:r="http://schemas.openxmlformats.org/officeDocument/2006/relationships">
+<p:sld xmlns:a="http://schemas.openxmlformats.org/drawingml/2006/main" xmlns:r="http://schemas.openxmlformats.org/officeDocument/2006/relationships" xmlns:p="http://schemas.openxmlformats.org/presentationml/2006/main">
   <p:cSld>
     <p:spTree>
       <p:nvGrpSpPr>
@@ -3644,7 +3671,14 @@
         <p:cNvGrpSpPr/>
         <p:nvPr/>
       </p:nvGrpSpPr>
-      <p:grpSpPr/>
+      <p:grpSpPr>
+        <a:xfrm>
+          <a:off x="0" y="0"/>
+          <a:ext cx="0" cy="0"/>
+          <a:chOff x="0" y="0"/>
+          <a:chExt cx="0" cy="0"/>
+        </a:xfrm>
+      </p:grpSpPr>
       <p:sp>
         <p:nvSpPr>
           <p:cNvPr id="2" name="Title 1"/>
@@ -3789,7 +3823,7 @@
 </file>
 
 <file path=ppt/slides/slide14.xml><?xml version="1.0" encoding="utf-8"?>
-<p:sld xmlns:a="http://schemas.openxmlformats.org/drawingml/2006/main" xmlns:p="http://schemas.openxmlformats.org/presentationml/2006/main" xmlns:r="http://schemas.openxmlformats.org/officeDocument/2006/relationships">
+<p:sld xmlns:a="http://schemas.openxmlformats.org/drawingml/2006/main" xmlns:r="http://schemas.openxmlformats.org/officeDocument/2006/relationships" xmlns:p="http://schemas.openxmlformats.org/presentationml/2006/main">
   <p:cSld>
     <p:spTree>
       <p:nvGrpSpPr>
@@ -3797,7 +3831,14 @@
         <p:cNvGrpSpPr/>
         <p:nvPr/>
       </p:nvGrpSpPr>
-      <p:grpSpPr/>
+      <p:grpSpPr>
+        <a:xfrm>
+          <a:off x="0" y="0"/>
+          <a:ext cx="0" cy="0"/>
+          <a:chOff x="0" y="0"/>
+          <a:chExt cx="0" cy="0"/>
+        </a:xfrm>
+      </p:grpSpPr>
       <p:sp>
         <p:nvSpPr>
           <p:cNvPr id="2" name="Title 1"/>
@@ -3942,7 +3983,7 @@
 </file>
 
 <file path=ppt/slides/slide15.xml><?xml version="1.0" encoding="utf-8"?>
-<p:sld xmlns:a="http://schemas.openxmlformats.org/drawingml/2006/main" xmlns:p="http://schemas.openxmlformats.org/presentationml/2006/main" xmlns:r="http://schemas.openxmlformats.org/officeDocument/2006/relationships">
+<p:sld xmlns:a="http://schemas.openxmlformats.org/drawingml/2006/main" xmlns:r="http://schemas.openxmlformats.org/officeDocument/2006/relationships" xmlns:p="http://schemas.openxmlformats.org/presentationml/2006/main">
   <p:cSld>
     <p:spTree>
       <p:nvGrpSpPr>
@@ -3950,7 +3991,14 @@
         <p:cNvGrpSpPr/>
         <p:nvPr/>
       </p:nvGrpSpPr>
-      <p:grpSpPr/>
+      <p:grpSpPr>
+        <a:xfrm>
+          <a:off x="0" y="0"/>
+          <a:ext cx="0" cy="0"/>
+          <a:chOff x="0" y="0"/>
+          <a:chExt cx="0" cy="0"/>
+        </a:xfrm>
+      </p:grpSpPr>
       <p:sp>
         <p:nvSpPr>
           <p:cNvPr id="2" name="Title 1"/>
@@ -4085,7 +4133,7 @@
 </file>
 
 <file path=ppt/slides/slide16.xml><?xml version="1.0" encoding="utf-8"?>
-<p:sld xmlns:a="http://schemas.openxmlformats.org/drawingml/2006/main" xmlns:p="http://schemas.openxmlformats.org/presentationml/2006/main" xmlns:r="http://schemas.openxmlformats.org/officeDocument/2006/relationships">
+<p:sld xmlns:a="http://schemas.openxmlformats.org/drawingml/2006/main" xmlns:r="http://schemas.openxmlformats.org/officeDocument/2006/relationships" xmlns:p="http://schemas.openxmlformats.org/presentationml/2006/main">
   <p:cSld>
     <p:spTree>
       <p:nvGrpSpPr>
@@ -4093,7 +4141,14 @@
         <p:cNvGrpSpPr/>
         <p:nvPr/>
       </p:nvGrpSpPr>
-      <p:grpSpPr/>
+      <p:grpSpPr>
+        <a:xfrm>
+          <a:off x="0" y="0"/>
+          <a:ext cx="0" cy="0"/>
+          <a:chOff x="0" y="0"/>
+          <a:chExt cx="0" cy="0"/>
+        </a:xfrm>
+      </p:grpSpPr>
       <p:sp>
         <p:nvSpPr>
           <p:cNvPr id="2" name="Title 1"/>
@@ -4228,7 +4283,7 @@
 </file>
 
 <file path=ppt/slides/slide17.xml><?xml version="1.0" encoding="utf-8"?>
-<p:sld xmlns:a="http://schemas.openxmlformats.org/drawingml/2006/main" xmlns:p="http://schemas.openxmlformats.org/presentationml/2006/main" xmlns:r="http://schemas.openxmlformats.org/officeDocument/2006/relationships">
+<p:sld xmlns:a="http://schemas.openxmlformats.org/drawingml/2006/main" xmlns:r="http://schemas.openxmlformats.org/officeDocument/2006/relationships" xmlns:p="http://schemas.openxmlformats.org/presentationml/2006/main">
   <p:cSld>
     <p:spTree>
       <p:nvGrpSpPr>
@@ -4236,7 +4291,14 @@
         <p:cNvGrpSpPr/>
         <p:nvPr/>
       </p:nvGrpSpPr>
-      <p:grpSpPr/>
+      <p:grpSpPr>
+        <a:xfrm>
+          <a:off x="0" y="0"/>
+          <a:ext cx="0" cy="0"/>
+          <a:chOff x="0" y="0"/>
+          <a:chExt cx="0" cy="0"/>
+        </a:xfrm>
+      </p:grpSpPr>
       <p:sp>
         <p:nvSpPr>
           <p:cNvPr id="2" name="Title 1"/>
@@ -4336,6 +4398,7 @@
                 <a:latin typeface="Consolas"/>
               </a:defRPr>
             </a:pPr>
+            <a:endParaRPr/>
           </a:p>
           <a:p>
             <a:pPr>
@@ -4368,7 +4431,7 @@
 </file>
 
 <file path=ppt/slides/slide18.xml><?xml version="1.0" encoding="utf-8"?>
-<p:sld xmlns:a="http://schemas.openxmlformats.org/drawingml/2006/main" xmlns:p="http://schemas.openxmlformats.org/presentationml/2006/main" xmlns:r="http://schemas.openxmlformats.org/officeDocument/2006/relationships">
+<p:sld xmlns:a="http://schemas.openxmlformats.org/drawingml/2006/main" xmlns:r="http://schemas.openxmlformats.org/officeDocument/2006/relationships" xmlns:p="http://schemas.openxmlformats.org/presentationml/2006/main">
   <p:cSld>
     <p:spTree>
       <p:nvGrpSpPr>
@@ -4376,7 +4439,14 @@
         <p:cNvGrpSpPr/>
         <p:nvPr/>
       </p:nvGrpSpPr>
-      <p:grpSpPr/>
+      <p:grpSpPr>
+        <a:xfrm>
+          <a:off x="0" y="0"/>
+          <a:ext cx="0" cy="0"/>
+          <a:chOff x="0" y="0"/>
+          <a:chExt cx="0" cy="0"/>
+        </a:xfrm>
+      </p:grpSpPr>
       <p:sp>
         <p:nvSpPr>
           <p:cNvPr id="2" name="Title 1"/>
@@ -4476,6 +4546,7 @@
                 <a:latin typeface="Consolas"/>
               </a:defRPr>
             </a:pPr>
+            <a:endParaRPr/>
           </a:p>
           <a:p>
             <a:pPr>
@@ -4503,6 +4574,7 @@
                 <a:latin typeface="Consolas"/>
               </a:defRPr>
             </a:pPr>
+            <a:endParaRPr/>
           </a:p>
           <a:p>
             <a:pPr>
@@ -4530,6 +4602,7 @@
                 <a:latin typeface="Consolas"/>
               </a:defRPr>
             </a:pPr>
+            <a:endParaRPr/>
           </a:p>
           <a:p>
             <a:pPr>
@@ -4552,7 +4625,7 @@
 </file>
 
 <file path=ppt/slides/slide19.xml><?xml version="1.0" encoding="utf-8"?>
-<p:sld xmlns:a="http://schemas.openxmlformats.org/drawingml/2006/main" xmlns:p="http://schemas.openxmlformats.org/presentationml/2006/main" xmlns:r="http://schemas.openxmlformats.org/officeDocument/2006/relationships">
+<p:sld xmlns:a="http://schemas.openxmlformats.org/drawingml/2006/main" xmlns:r="http://schemas.openxmlformats.org/officeDocument/2006/relationships" xmlns:p="http://schemas.openxmlformats.org/presentationml/2006/main">
   <p:cSld>
     <p:spTree>
       <p:nvGrpSpPr>
@@ -4560,7 +4633,14 @@
         <p:cNvGrpSpPr/>
         <p:nvPr/>
       </p:nvGrpSpPr>
-      <p:grpSpPr/>
+      <p:grpSpPr>
+        <a:xfrm>
+          <a:off x="0" y="0"/>
+          <a:ext cx="0" cy="0"/>
+          <a:chOff x="0" y="0"/>
+          <a:chExt cx="0" cy="0"/>
+        </a:xfrm>
+      </p:grpSpPr>
       <p:sp>
         <p:nvSpPr>
           <p:cNvPr id="2" name="Title 1"/>
@@ -4684,7 +4764,7 @@
 </file>
 
 <file path=ppt/slides/slide2.xml><?xml version="1.0" encoding="utf-8"?>
-<p:sld xmlns:a="http://schemas.openxmlformats.org/drawingml/2006/main" xmlns:p="http://schemas.openxmlformats.org/presentationml/2006/main" xmlns:r="http://schemas.openxmlformats.org/officeDocument/2006/relationships">
+<p:sld xmlns:a="http://schemas.openxmlformats.org/drawingml/2006/main" xmlns:r="http://schemas.openxmlformats.org/officeDocument/2006/relationships" xmlns:p="http://schemas.openxmlformats.org/presentationml/2006/main">
   <p:cSld>
     <p:spTree>
       <p:nvGrpSpPr>
@@ -4692,7 +4772,14 @@
         <p:cNvGrpSpPr/>
         <p:nvPr/>
       </p:nvGrpSpPr>
-      <p:grpSpPr/>
+      <p:grpSpPr>
+        <a:xfrm>
+          <a:off x="0" y="0"/>
+          <a:ext cx="0" cy="0"/>
+          <a:chOff x="0" y="0"/>
+          <a:chExt cx="0" cy="0"/>
+        </a:xfrm>
+      </p:grpSpPr>
       <p:sp>
         <p:nvSpPr>
           <p:cNvPr id="2" name="Title 1"/>
@@ -4794,7 +4881,7 @@
 </file>
 
 <file path=ppt/slides/slide20.xml><?xml version="1.0" encoding="utf-8"?>
-<p:sld xmlns:a="http://schemas.openxmlformats.org/drawingml/2006/main" xmlns:p="http://schemas.openxmlformats.org/presentationml/2006/main" xmlns:r="http://schemas.openxmlformats.org/officeDocument/2006/relationships">
+<p:sld xmlns:a="http://schemas.openxmlformats.org/drawingml/2006/main" xmlns:r="http://schemas.openxmlformats.org/officeDocument/2006/relationships" xmlns:p="http://schemas.openxmlformats.org/presentationml/2006/main">
   <p:cSld>
     <p:spTree>
       <p:nvGrpSpPr>
@@ -4802,7 +4889,14 @@
         <p:cNvGrpSpPr/>
         <p:nvPr/>
       </p:nvGrpSpPr>
-      <p:grpSpPr/>
+      <p:grpSpPr>
+        <a:xfrm>
+          <a:off x="0" y="0"/>
+          <a:ext cx="0" cy="0"/>
+          <a:chOff x="0" y="0"/>
+          <a:chExt cx="0" cy="0"/>
+        </a:xfrm>
+      </p:grpSpPr>
       <p:sp>
         <p:nvSpPr>
           <p:cNvPr id="2" name="Title 1"/>
@@ -4904,7 +4998,7 @@
 </file>
 
 <file path=ppt/slides/slide21.xml><?xml version="1.0" encoding="utf-8"?>
-<p:sld xmlns:a="http://schemas.openxmlformats.org/drawingml/2006/main" xmlns:p="http://schemas.openxmlformats.org/presentationml/2006/main" xmlns:r="http://schemas.openxmlformats.org/officeDocument/2006/relationships">
+<p:sld xmlns:a="http://schemas.openxmlformats.org/drawingml/2006/main" xmlns:r="http://schemas.openxmlformats.org/officeDocument/2006/relationships" xmlns:p="http://schemas.openxmlformats.org/presentationml/2006/main">
   <p:cSld>
     <p:spTree>
       <p:nvGrpSpPr>
@@ -4912,7 +5006,14 @@
         <p:cNvGrpSpPr/>
         <p:nvPr/>
       </p:nvGrpSpPr>
-      <p:grpSpPr/>
+      <p:grpSpPr>
+        <a:xfrm>
+          <a:off x="0" y="0"/>
+          <a:ext cx="0" cy="0"/>
+          <a:chOff x="0" y="0"/>
+          <a:chExt cx="0" cy="0"/>
+        </a:xfrm>
+      </p:grpSpPr>
       <p:sp>
         <p:nvSpPr>
           <p:cNvPr id="2" name="Title 1"/>
@@ -5025,7 +5126,7 @@
 </file>
 
 <file path=ppt/slides/slide3.xml><?xml version="1.0" encoding="utf-8"?>
-<p:sld xmlns:a="http://schemas.openxmlformats.org/drawingml/2006/main" xmlns:p="http://schemas.openxmlformats.org/presentationml/2006/main" xmlns:r="http://schemas.openxmlformats.org/officeDocument/2006/relationships">
+<p:sld xmlns:a="http://schemas.openxmlformats.org/drawingml/2006/main" xmlns:r="http://schemas.openxmlformats.org/officeDocument/2006/relationships" xmlns:p="http://schemas.openxmlformats.org/presentationml/2006/main">
   <p:cSld>
     <p:spTree>
       <p:nvGrpSpPr>
@@ -5033,7 +5134,14 @@
         <p:cNvGrpSpPr/>
         <p:nvPr/>
       </p:nvGrpSpPr>
-      <p:grpSpPr/>
+      <p:grpSpPr>
+        <a:xfrm>
+          <a:off x="0" y="0"/>
+          <a:ext cx="0" cy="0"/>
+          <a:chOff x="0" y="0"/>
+          <a:chExt cx="0" cy="0"/>
+        </a:xfrm>
+      </p:grpSpPr>
       <p:sp>
         <p:nvSpPr>
           <p:cNvPr id="2" name="Title 1"/>
@@ -5081,7 +5189,48 @@
               <a:defRPr sz="1800"/>
             </a:pPr>
             <a:r>
-              <a:t>AND/OR/제외/정규식으로 로그를 단계적으로 좁힙니다.</a:t>
+              <a:rPr dirty="0"/>
+              <a:t>AND/OR/</a:t>
+            </a:r>
+            <a:r>
+              <a:rPr dirty="0" err="1"/>
+              <a:t>제외</a:t>
+            </a:r>
+            <a:r>
+              <a:rPr dirty="0"/>
+              <a:t>/</a:t>
+            </a:r>
+            <a:r>
+              <a:rPr dirty="0" err="1"/>
+              <a:t>정규식으로</a:t>
+            </a:r>
+            <a:r>
+              <a:rPr dirty="0"/>
+              <a:t> </a:t>
+            </a:r>
+            <a:r>
+              <a:rPr dirty="0" err="1"/>
+              <a:t>로그를</a:t>
+            </a:r>
+            <a:r>
+              <a:rPr dirty="0"/>
+              <a:t> </a:t>
+            </a:r>
+            <a:r>
+              <a:rPr dirty="0" err="1"/>
+              <a:t>단계적으로</a:t>
+            </a:r>
+            <a:r>
+              <a:rPr dirty="0"/>
+              <a:t> </a:t>
+            </a:r>
+            <a:r>
+              <a:rPr dirty="0" err="1"/>
+              <a:t>좁힙니다</a:t>
+            </a:r>
+            <a:r>
+              <a:rPr dirty="0"/>
+              <a:t>.</a:t>
             </a:r>
           </a:p>
         </p:txBody>
@@ -5178,7 +5327,7 @@
 </file>
 
 <file path=ppt/slides/slide4.xml><?xml version="1.0" encoding="utf-8"?>
-<p:sld xmlns:a="http://schemas.openxmlformats.org/drawingml/2006/main" xmlns:p="http://schemas.openxmlformats.org/presentationml/2006/main" xmlns:r="http://schemas.openxmlformats.org/officeDocument/2006/relationships">
+<p:sld xmlns:a="http://schemas.openxmlformats.org/drawingml/2006/main" xmlns:r="http://schemas.openxmlformats.org/officeDocument/2006/relationships" xmlns:p="http://schemas.openxmlformats.org/presentationml/2006/main">
   <p:cSld>
     <p:spTree>
       <p:nvGrpSpPr>
@@ -5186,7 +5335,14 @@
         <p:cNvGrpSpPr/>
         <p:nvPr/>
       </p:nvGrpSpPr>
-      <p:grpSpPr/>
+      <p:grpSpPr>
+        <a:xfrm>
+          <a:off x="0" y="0"/>
+          <a:ext cx="0" cy="0"/>
+          <a:chOff x="0" y="0"/>
+          <a:chExt cx="0" cy="0"/>
+        </a:xfrm>
+      </p:grpSpPr>
       <p:sp>
         <p:nvSpPr>
           <p:cNvPr id="2" name="Title 1"/>
@@ -5311,7 +5467,7 @@
 </file>
 
 <file path=ppt/slides/slide5.xml><?xml version="1.0" encoding="utf-8"?>
-<p:sld xmlns:a="http://schemas.openxmlformats.org/drawingml/2006/main" xmlns:p="http://schemas.openxmlformats.org/presentationml/2006/main" xmlns:r="http://schemas.openxmlformats.org/officeDocument/2006/relationships">
+<p:sld xmlns:a="http://schemas.openxmlformats.org/drawingml/2006/main" xmlns:r="http://schemas.openxmlformats.org/officeDocument/2006/relationships" xmlns:p="http://schemas.openxmlformats.org/presentationml/2006/main">
   <p:cSld>
     <p:spTree>
       <p:nvGrpSpPr>
@@ -5319,7 +5475,14 @@
         <p:cNvGrpSpPr/>
         <p:nvPr/>
       </p:nvGrpSpPr>
-      <p:grpSpPr/>
+      <p:grpSpPr>
+        <a:xfrm>
+          <a:off x="0" y="0"/>
+          <a:ext cx="0" cy="0"/>
+          <a:chOff x="0" y="0"/>
+          <a:chExt cx="0" cy="0"/>
+        </a:xfrm>
+      </p:grpSpPr>
       <p:sp>
         <p:nvSpPr>
           <p:cNvPr id="2" name="Title 1"/>
@@ -5429,6 +5592,7 @@
                 <a:latin typeface="Consolas"/>
               </a:defRPr>
             </a:pPr>
+            <a:endParaRPr/>
           </a:p>
           <a:p>
             <a:pPr>
@@ -5461,7 +5625,7 @@
 </file>
 
 <file path=ppt/slides/slide6.xml><?xml version="1.0" encoding="utf-8"?>
-<p:sld xmlns:a="http://schemas.openxmlformats.org/drawingml/2006/main" xmlns:p="http://schemas.openxmlformats.org/presentationml/2006/main" xmlns:r="http://schemas.openxmlformats.org/officeDocument/2006/relationships">
+<p:sld xmlns:a="http://schemas.openxmlformats.org/drawingml/2006/main" xmlns:r="http://schemas.openxmlformats.org/officeDocument/2006/relationships" xmlns:p="http://schemas.openxmlformats.org/presentationml/2006/main">
   <p:cSld>
     <p:spTree>
       <p:nvGrpSpPr>
@@ -5469,7 +5633,14 @@
         <p:cNvGrpSpPr/>
         <p:nvPr/>
       </p:nvGrpSpPr>
-      <p:grpSpPr/>
+      <p:grpSpPr>
+        <a:xfrm>
+          <a:off x="0" y="0"/>
+          <a:ext cx="0" cy="0"/>
+          <a:chOff x="0" y="0"/>
+          <a:chExt cx="0" cy="0"/>
+        </a:xfrm>
+      </p:grpSpPr>
       <p:sp>
         <p:nvSpPr>
           <p:cNvPr id="2" name="Title 1"/>
@@ -5594,7 +5765,7 @@
 </file>
 
 <file path=ppt/slides/slide7.xml><?xml version="1.0" encoding="utf-8"?>
-<p:sld xmlns:a="http://schemas.openxmlformats.org/drawingml/2006/main" xmlns:p="http://schemas.openxmlformats.org/presentationml/2006/main" xmlns:r="http://schemas.openxmlformats.org/officeDocument/2006/relationships">
+<p:sld xmlns:a="http://schemas.openxmlformats.org/drawingml/2006/main" xmlns:r="http://schemas.openxmlformats.org/officeDocument/2006/relationships" xmlns:p="http://schemas.openxmlformats.org/presentationml/2006/main">
   <p:cSld>
     <p:spTree>
       <p:nvGrpSpPr>
@@ -5602,7 +5773,14 @@
         <p:cNvGrpSpPr/>
         <p:nvPr/>
       </p:nvGrpSpPr>
-      <p:grpSpPr/>
+      <p:grpSpPr>
+        <a:xfrm>
+          <a:off x="0" y="0"/>
+          <a:ext cx="0" cy="0"/>
+          <a:chOff x="0" y="0"/>
+          <a:chExt cx="0" cy="0"/>
+        </a:xfrm>
+      </p:grpSpPr>
       <p:sp>
         <p:nvSpPr>
           <p:cNvPr id="2" name="Title 1"/>
@@ -5702,6 +5880,7 @@
                 <a:latin typeface="Consolas"/>
               </a:defRPr>
             </a:pPr>
+            <a:endParaRPr/>
           </a:p>
           <a:p>
             <a:pPr>
@@ -5729,6 +5908,7 @@
                 <a:latin typeface="Consolas"/>
               </a:defRPr>
             </a:pPr>
+            <a:endParaRPr/>
           </a:p>
           <a:p>
             <a:pPr>
@@ -5756,6 +5936,7 @@
                 <a:latin typeface="Consolas"/>
               </a:defRPr>
             </a:pPr>
+            <a:endParaRPr/>
           </a:p>
           <a:p>
             <a:pPr>
@@ -5788,7 +5969,7 @@
 </file>
 
 <file path=ppt/slides/slide8.xml><?xml version="1.0" encoding="utf-8"?>
-<p:sld xmlns:a="http://schemas.openxmlformats.org/drawingml/2006/main" xmlns:p="http://schemas.openxmlformats.org/presentationml/2006/main" xmlns:r="http://schemas.openxmlformats.org/officeDocument/2006/relationships">
+<p:sld xmlns:a="http://schemas.openxmlformats.org/drawingml/2006/main" xmlns:r="http://schemas.openxmlformats.org/officeDocument/2006/relationships" xmlns:p="http://schemas.openxmlformats.org/presentationml/2006/main">
   <p:cSld>
     <p:spTree>
       <p:nvGrpSpPr>
@@ -5796,7 +5977,14 @@
         <p:cNvGrpSpPr/>
         <p:nvPr/>
       </p:nvGrpSpPr>
-      <p:grpSpPr/>
+      <p:grpSpPr>
+        <a:xfrm>
+          <a:off x="0" y="0"/>
+          <a:ext cx="0" cy="0"/>
+          <a:chOff x="0" y="0"/>
+          <a:chExt cx="0" cy="0"/>
+        </a:xfrm>
+      </p:grpSpPr>
       <p:sp>
         <p:nvSpPr>
           <p:cNvPr id="2" name="Title 1"/>
@@ -5886,6 +6074,7 @@
                 <a:latin typeface="Consolas"/>
               </a:defRPr>
             </a:pPr>
+            <a:endParaRPr/>
           </a:p>
           <a:p>
             <a:pPr>
@@ -5988,7 +6177,7 @@
 </file>
 
 <file path=ppt/slides/slide9.xml><?xml version="1.0" encoding="utf-8"?>
-<p:sld xmlns:a="http://schemas.openxmlformats.org/drawingml/2006/main" xmlns:p="http://schemas.openxmlformats.org/presentationml/2006/main" xmlns:r="http://schemas.openxmlformats.org/officeDocument/2006/relationships">
+<p:sld xmlns:a="http://schemas.openxmlformats.org/drawingml/2006/main" xmlns:r="http://schemas.openxmlformats.org/officeDocument/2006/relationships" xmlns:p="http://schemas.openxmlformats.org/presentationml/2006/main">
   <p:cSld>
     <p:spTree>
       <p:nvGrpSpPr>
@@ -5996,7 +6185,14 @@
         <p:cNvGrpSpPr/>
         <p:nvPr/>
       </p:nvGrpSpPr>
-      <p:grpSpPr/>
+      <p:grpSpPr>
+        <a:xfrm>
+          <a:off x="0" y="0"/>
+          <a:ext cx="0" cy="0"/>
+          <a:chOff x="0" y="0"/>
+          <a:chExt cx="0" cy="0"/>
+        </a:xfrm>
+      </p:grpSpPr>
       <p:sp>
         <p:nvSpPr>
           <p:cNvPr id="2" name="Title 1"/>
